--- a/samples/Ironclad_Downtime_Work_Instruction.pptx
+++ b/samples/Ironclad_Downtime_Work_Instruction.pptx
@@ -9,6 +9,7 @@
     <p:sldId id="257" r:id="rId3"/>
     <p:sldId id="258" r:id="rId4"/>
     <p:sldId id="259" r:id="rId5"/>
+    <p:sldId id="261" r:id="rId12"/>
     <p:sldId id="260" r:id="rId6"/>
   </p:sldIdLst>
   <p:notesMasterIdLst>
@@ -2076,7 +2077,7 @@
                 <a:ea typeface="Arial" pitchFamily="34" charset="-122"/>
                 <a:cs typeface="Arial" pitchFamily="34" charset="-120"/>
               </a:rPr>
-              <a:t>Page 2 of 4</a:t>
+              <a:t>Page 2 of 5</a:t>
             </a:r>
             <a:endParaRPr lang="en-US" sz="900" dirty="0"/>
           </a:p>
@@ -2713,11 +2714,11 @@
             </a:avLst>
           </a:prstGeom>
           <a:solidFill>
-            <a:srgbClr val="FFFFFF"/>
+            <a:srgbClr val="FCEFE3"/>
           </a:solidFill>
           <a:ln w="12700">
             <a:solidFill>
-              <a:srgbClr val="D9D9D9"/>
+              <a:srgbClr val="E67E22"/>
             </a:solidFill>
             <a:prstDash val="solid"/>
           </a:ln>
@@ -2745,7 +2746,7 @@
             <a:avLst/>
           </a:prstGeom>
           <a:solidFill>
-            <a:srgbClr val="2E75B6"/>
+            <a:srgbClr val="E67E22"/>
           </a:solidFill>
           <a:ln/>
         </p:spPr>
@@ -3191,7 +3192,7 @@
                 <a:ea typeface="Arial" pitchFamily="34" charset="-122"/>
                 <a:cs typeface="Arial" pitchFamily="34" charset="-120"/>
               </a:rPr>
-              <a:t>Page 3 of 4</a:t>
+              <a:t>Page 3 of 5</a:t>
             </a:r>
             <a:endParaRPr lang="en-US" sz="900" dirty="0"/>
           </a:p>
@@ -3233,6 +3234,45 @@
               <a:t>DEMO COPY ONLY — Fictional company, sample data for portfolio use.</a:t>
             </a:r>
             <a:endParaRPr lang="en-US" sz="900" dirty="0"/>
+          </a:p>
+        </p:txBody>
+      </p:sp>
+      <p:sp>
+        <p:nvSpPr>
+          <p:cNvPr id="12" name="Text 9"/>
+          <p:cNvSpPr/>
+          <p:nvPr/>
+        </p:nvSpPr>
+        <p:spPr>
+          <a:xfrm>
+            <a:off x="10360152" y="3410712"/>
+            <a:ext cx="1188720" cy="219456"/>
+          </a:xfrm>
+          <a:prstGeom prst="rect">
+            <a:avLst/>
+          </a:prstGeom>
+          <a:noFill/>
+          <a:ln/>
+        </p:spPr>
+        <p:txBody>
+          <a:bodyPr wrap="square" lIns="0" tIns="0" rIns="0" bIns="0" rtlCol="0" anchor="ctr"/>
+          <a:lstStyle/>
+          <a:p>
+            <a:pPr algn="r" indent="0" marL="0">
+              <a:buNone/>
+            </a:pPr>
+            <a:r>
+              <a:rPr lang="en-US" sz="800" b="1" dirty="0">
+                <a:solidFill>
+                  <a:srgbClr val="E67E22"/>
+                </a:solidFill>
+                <a:latin typeface="Arial" pitchFamily="34" charset="0"/>
+                <a:ea typeface="Arial" pitchFamily="34" charset="-122"/>
+                <a:cs typeface="Arial" pitchFamily="34" charset="-120"/>
+              </a:rPr>
+              <a:t>QC CHECK</a:t>
+            </a:r>
+            <a:endParaRPr lang="en-US" sz="800" dirty="0"/>
           </a:p>
         </p:txBody>
       </p:sp>
@@ -3432,11 +3472,11 @@
             </a:avLst>
           </a:prstGeom>
           <a:solidFill>
-            <a:srgbClr val="FCEFE3"/>
+            <a:srgbClr val="FFFFFF"/>
           </a:solidFill>
           <a:ln w="19050">
             <a:solidFill>
-              <a:srgbClr val="E67E22"/>
+              <a:srgbClr val="D9D9D9"/>
             </a:solidFill>
             <a:prstDash val="solid"/>
           </a:ln>
@@ -3464,7 +3504,7 @@
             <a:avLst/>
           </a:prstGeom>
           <a:solidFill>
-            <a:srgbClr val="E67E22"/>
+            <a:srgbClr val="2E75B6"/>
           </a:solidFill>
           <a:ln/>
         </p:spPr>
@@ -3610,45 +3650,6 @@
               <a:t>Confirm fault code and downtime log are complete before starting.</a:t>
             </a:r>
             <a:endParaRPr lang="en-US" sz="1000" dirty="0"/>
-          </a:p>
-        </p:txBody>
-      </p:sp>
-      <p:sp>
-        <p:nvSpPr>
-          <p:cNvPr id="12" name="Text 9"/>
-          <p:cNvSpPr/>
-          <p:nvPr/>
-        </p:nvSpPr>
-        <p:spPr>
-          <a:xfrm>
-            <a:off x="1764792" y="3410712"/>
-            <a:ext cx="1188720" cy="219456"/>
-          </a:xfrm>
-          <a:prstGeom prst="rect">
-            <a:avLst/>
-          </a:prstGeom>
-          <a:noFill/>
-          <a:ln/>
-        </p:spPr>
-        <p:txBody>
-          <a:bodyPr wrap="square" lIns="0" tIns="0" rIns="0" bIns="0" rtlCol="0" anchor="ctr"/>
-          <a:lstStyle/>
-          <a:p>
-            <a:pPr algn="r" indent="0" marL="0">
-              <a:buNone/>
-            </a:pPr>
-            <a:r>
-              <a:rPr lang="en-US" sz="800" b="1" dirty="0">
-                <a:solidFill>
-                  <a:srgbClr val="E67E22"/>
-                </a:solidFill>
-                <a:latin typeface="Arial" pitchFamily="34" charset="0"/>
-                <a:ea typeface="Arial" pitchFamily="34" charset="-122"/>
-                <a:cs typeface="Arial" pitchFamily="34" charset="-120"/>
-              </a:rPr>
-              <a:t>QC CHECK</a:t>
-            </a:r>
-            <a:endParaRPr lang="en-US" sz="800" dirty="0"/>
           </a:p>
         </p:txBody>
       </p:sp>
@@ -4714,7 +4715,7 @@
                 <a:ea typeface="Arial" pitchFamily="34" charset="-122"/>
                 <a:cs typeface="Arial" pitchFamily="34" charset="-120"/>
               </a:rPr>
-              <a:t>Page 4 of 4</a:t>
+              <a:t>Page 4 of 5</a:t>
             </a:r>
             <a:endParaRPr lang="en-US" sz="900" dirty="0"/>
           </a:p>
@@ -5463,6 +5464,679 @@
       <p:sp>
         <p:nvSpPr>
           <p:cNvPr id="17" name="Text 15"/>
+          <p:cNvSpPr/>
+          <p:nvPr/>
+        </p:nvSpPr>
+        <p:spPr>
+          <a:xfrm>
+            <a:off x="6245352" y="6492240"/>
+            <a:ext cx="5486400" cy="274320"/>
+          </a:xfrm>
+          <a:prstGeom prst="rect">
+            <a:avLst/>
+          </a:prstGeom>
+          <a:noFill/>
+          <a:ln/>
+        </p:spPr>
+        <p:txBody>
+          <a:bodyPr wrap="square" lIns="0" tIns="0" rIns="0" bIns="0" rtlCol="0" anchor="ctr"/>
+          <a:lstStyle/>
+          <a:p>
+            <a:pPr algn="r" indent="0" marL="0">
+              <a:buNone/>
+            </a:pPr>
+            <a:r>
+              <a:rPr lang="en-US" sz="900" i="1" dirty="0">
+                <a:solidFill>
+                  <a:srgbClr val="595959"/>
+                </a:solidFill>
+                <a:latin typeface="Arial" pitchFamily="34" charset="0"/>
+                <a:ea typeface="Arial" pitchFamily="34" charset="-122"/>
+                <a:cs typeface="Arial" pitchFamily="34" charset="-120"/>
+              </a:rPr>
+              <a:t>DEMO COPY ONLY — Fictional company, sample data for portfolio use.</a:t>
+            </a:r>
+            <a:endParaRPr lang="en-US" sz="900" dirty="0"/>
+          </a:p>
+        </p:txBody>
+      </p:sp>
+    </p:spTree>
+  </p:cSld>
+  <p:clrMapOvr>
+    <a:masterClrMapping/>
+  </p:clrMapOvr>
+</p:sld>
+</file>
+
+<file path=ppt/slides/slide6.xml><?xml version="1.0" encoding="utf-8"?>
+<p:sld xmlns:a="http://schemas.openxmlformats.org/drawingml/2006/main" xmlns:r="http://schemas.openxmlformats.org/officeDocument/2006/relationships" xmlns:p="http://schemas.openxmlformats.org/presentationml/2006/main">
+  <p:cSld name="Slide 2">
+    <p:spTree>
+      <p:nvGrpSpPr>
+        <p:cNvPr id="1" name=""/>
+        <p:cNvGrpSpPr/>
+        <p:nvPr/>
+      </p:nvGrpSpPr>
+      <p:grpSpPr>
+        <a:xfrm>
+          <a:off x="0" y="0"/>
+          <a:ext cx="0" cy="0"/>
+          <a:chOff x="0" y="0"/>
+          <a:chExt cx="0" cy="0"/>
+        </a:xfrm>
+      </p:grpSpPr>
+      <p:sp>
+        <p:nvSpPr>
+          <p:cNvPr id="2" name="Shape 0"/>
+          <p:cNvSpPr/>
+          <p:nvPr/>
+        </p:nvSpPr>
+        <p:spPr>
+          <a:xfrm>
+            <a:off x="0" y="0"/>
+            <a:ext cx="12188952" cy="868680"/>
+          </a:xfrm>
+          <a:prstGeom prst="rect">
+            <a:avLst/>
+          </a:prstGeom>
+          <a:solidFill>
+            <a:srgbClr val="1F4E79"/>
+          </a:solidFill>
+          <a:ln/>
+        </p:spPr>
+      </p:sp>
+      <p:sp>
+        <p:nvSpPr>
+          <p:cNvPr id="3" name="Text 1"/>
+          <p:cNvSpPr/>
+          <p:nvPr/>
+        </p:nvSpPr>
+        <p:spPr>
+          <a:xfrm>
+            <a:off x="457200" y="0"/>
+            <a:ext cx="8686800" cy="868680"/>
+          </a:xfrm>
+          <a:prstGeom prst="rect">
+            <a:avLst/>
+          </a:prstGeom>
+          <a:noFill/>
+          <a:ln/>
+        </p:spPr>
+        <p:txBody>
+          <a:bodyPr wrap="square" lIns="0" tIns="0" rIns="0" bIns="0" rtlCol="0" anchor="ctr"/>
+          <a:lstStyle/>
+          <a:p>
+            <a:pPr indent="0" marL="0">
+              <a:buNone/>
+            </a:pPr>
+            <a:r>
+              <a:rPr lang="en-US" sz="2200" b="1" dirty="0">
+                <a:solidFill>
+                  <a:srgbClr val="FFFFFF"/>
+                </a:solidFill>
+                <a:latin typeface="Arial" pitchFamily="34" charset="0"/>
+                <a:ea typeface="Arial" pitchFamily="34" charset="-122"/>
+                <a:cs typeface="Arial" pitchFamily="34" charset="-120"/>
+              </a:rPr>
+              <a:t>Quality Checkpoints — If a Check Fails</a:t>
+            </a:r>
+            <a:endParaRPr lang="en-US" sz="2200" dirty="0"/>
+          </a:p>
+        </p:txBody>
+      </p:sp>
+      <p:sp>
+        <p:nvSpPr>
+          <p:cNvPr id="4" name="Text 2"/>
+          <p:cNvSpPr/>
+          <p:nvPr/>
+        </p:nvSpPr>
+        <p:spPr>
+          <a:xfrm>
+            <a:off x="8961120" y="91440"/>
+            <a:ext cx="3063240" cy="731520"/>
+          </a:xfrm>
+          <a:prstGeom prst="rect">
+            <a:avLst/>
+          </a:prstGeom>
+          <a:noFill/>
+          <a:ln/>
+        </p:spPr>
+        <p:txBody>
+          <a:bodyPr wrap="square" lIns="0" tIns="0" rIns="0" bIns="0" rtlCol="0" anchor="ctr"/>
+          <a:lstStyle/>
+          <a:p>
+            <a:pPr algn="r" indent="0" marL="0">
+              <a:buNone/>
+            </a:pPr>
+            <a:r>
+              <a:rPr lang="en-US" sz="1100" dirty="0">
+                <a:solidFill>
+                  <a:srgbClr val="BFD3E8"/>
+                </a:solidFill>
+                <a:latin typeface="Arial" pitchFamily="34" charset="0"/>
+                <a:ea typeface="Arial" pitchFamily="34" charset="-122"/>
+                <a:cs typeface="Arial" pitchFamily="34" charset="-120"/>
+              </a:rPr>
+              <a:t>WI-VA-MNT-001</a:t>
+            </a:r>
+            <a:endParaRPr lang="en-US" sz="1100" dirty="0"/>
+          </a:p>
+          <a:p>
+            <a:pPr algn="r" indent="0" marL="0">
+              <a:buNone/>
+            </a:pPr>
+            <a:r>
+              <a:rPr lang="en-US" sz="1000" i="1" dirty="0">
+                <a:solidFill>
+                  <a:srgbClr val="8FA9C4"/>
+                </a:solidFill>
+                <a:latin typeface="Arial" pitchFamily="34" charset="0"/>
+                <a:ea typeface="Arial" pitchFamily="34" charset="-122"/>
+                <a:cs typeface="Arial" pitchFamily="34" charset="-120"/>
+              </a:rPr>
+              <a:t>Ironclad Metal Works — Demo Copy Only</a:t>
+            </a:r>
+            <a:endParaRPr lang="en-US" sz="1100" dirty="0"/>
+          </a:p>
+        </p:txBody>
+      </p:sp>
+      <p:sp>
+        <p:nvSpPr>
+          <p:cNvPr id="5" name="Shape 3"/>
+          <p:cNvSpPr/>
+          <p:nvPr/>
+        </p:nvSpPr>
+        <p:spPr>
+          <a:xfrm>
+            <a:off x="457200" y="1143000"/>
+            <a:ext cx="5486400" cy="4754880"/>
+          </a:xfrm>
+          <a:prstGeom prst="roundRect">
+            <a:avLst>
+              <a:gd name="adj" fmla="val 1538"/>
+            </a:avLst>
+          </a:prstGeom>
+          <a:solidFill>
+            <a:srgbClr val="FCEFE3"/>
+          </a:solidFill>
+          <a:ln w="15240">
+            <a:solidFill>
+              <a:srgbClr val="E67E22"/>
+            </a:solidFill>
+            <a:prstDash val="solid"/>
+          </a:ln>
+        </p:spPr>
+      </p:sp>
+      <p:pic>
+        <p:nvPicPr>
+          <p:cNvPr id="6" name="Image 0" descr="/home/claude/ironclad/icons/hard_hat.png">    </p:cNvPr>
+          <p:cNvPicPr>
+            <a:picLocks noChangeAspect="1"/>
+          </p:cNvPicPr>
+          <p:nvPr/>
+        </p:nvPicPr>
+        <p:blipFill>
+          <a:blip r:embed="rId4"/>
+          <a:stretch>
+            <a:fillRect/>
+          </a:stretch>
+        </p:blipFill>
+        <p:spPr>
+          <a:xfrm>
+            <a:off x="731520" y="1417320"/>
+            <a:ext cx="457200" cy="457200"/>
+          </a:xfrm>
+          <a:prstGeom prst="rect">
+            <a:avLst/>
+          </a:prstGeom>
+        </p:spPr>
+      </p:pic>
+      <p:sp>
+        <p:nvSpPr>
+          <p:cNvPr id="7" name="Text 4"/>
+          <p:cNvSpPr/>
+          <p:nvPr/>
+        </p:nvSpPr>
+        <p:spPr>
+          <a:xfrm>
+            <a:off x="1325880" y="1417320"/>
+            <a:ext cx="4389120" cy="457200"/>
+          </a:xfrm>
+          <a:prstGeom prst="rect">
+            <a:avLst/>
+          </a:prstGeom>
+          <a:noFill/>
+          <a:ln/>
+        </p:spPr>
+        <p:txBody>
+          <a:bodyPr wrap="square" lIns="0" tIns="0" rIns="0" bIns="0" rtlCol="0" anchor="ctr"/>
+          <a:lstStyle/>
+          <a:p>
+            <a:pPr indent="0" marL="0">
+              <a:buNone/>
+            </a:pPr>
+            <a:r>
+              <a:rPr lang="en-US" sz="1600" b="1" dirty="0">
+                <a:solidFill>
+                  <a:srgbClr val="1F4E79"/>
+                </a:solidFill>
+                <a:latin typeface="Arial" pitchFamily="34" charset="0"/>
+                <a:ea typeface="Arial" pitchFamily="34" charset="-122"/>
+                <a:cs typeface="Arial" pitchFamily="34" charset="-120"/>
+              </a:rPr>
+              <a:t>Checkpoint 1 — Fault Log (Operator)</a:t>
+            </a:r>
+            <a:endParaRPr lang="en-US" sz="1600" dirty="0"/>
+          </a:p>
+        </p:txBody>
+      </p:sp>
+      <p:sp>
+        <p:nvSpPr>
+          <p:cNvPr id="8" name="Text 5"/>
+          <p:cNvSpPr/>
+          <p:nvPr/>
+        </p:nvSpPr>
+        <p:spPr>
+          <a:xfrm>
+            <a:off x="777240" y="2011680"/>
+            <a:ext cx="4846320" cy="3566160"/>
+          </a:xfrm>
+          <a:prstGeom prst="rect">
+            <a:avLst/>
+          </a:prstGeom>
+          <a:noFill/>
+          <a:ln/>
+        </p:spPr>
+        <p:txBody>
+          <a:bodyPr wrap="square" rtlCol="0" anchor="t"/>
+          <a:lstStyle/>
+          <a:p>
+            <a:pPr marL="342900" indent="-342900">
+              <a:lnSpc>
+                <a:spcPct val="115000"/>
+              </a:lnSpc>
+              <a:buSzPct val="100000"/>
+              <a:buChar char="•"/>
+            </a:pPr>
+            <a:r>
+              <a:rPr lang="en-US" sz="1250" dirty="0">
+                <a:solidFill>
+                  <a:srgbClr val="3A3A3A"/>
+                </a:solidFill>
+                <a:latin typeface="Arial" pitchFamily="34" charset="0"/>
+                <a:ea typeface="Arial" pitchFamily="34" charset="-122"/>
+                <a:cs typeface="Arial" pitchFamily="34" charset="-120"/>
+              </a:rPr>
+              <a:t>Check: are the fault code and downtime start time logged?</a:t>
+            </a:r>
+            <a:endParaRPr lang="en-US" sz="1250" dirty="0"/>
+          </a:p>
+          <a:p>
+            <a:pPr marL="342900" indent="-342900">
+              <a:lnSpc>
+                <a:spcPct val="115000"/>
+              </a:lnSpc>
+              <a:buSzPct val="100000"/>
+              <a:buChar char="•"/>
+            </a:pPr>
+            <a:r>
+              <a:rPr lang="en-US" sz="1250" dirty="0">
+                <a:solidFill>
+                  <a:srgbClr val="3A3A3A"/>
+                </a:solidFill>
+                <a:latin typeface="Arial" pitchFamily="34" charset="0"/>
+                <a:ea typeface="Arial" pitchFamily="34" charset="-122"/>
+                <a:cs typeface="Arial" pitchFamily="34" charset="-120"/>
+              </a:rPr>
+              <a:t>YES — notify the Maintenance Technician.</a:t>
+            </a:r>
+            <a:endParaRPr lang="en-US" sz="1250" dirty="0"/>
+          </a:p>
+          <a:p>
+            <a:pPr marL="342900" indent="-342900">
+              <a:lnSpc>
+                <a:spcPct val="115000"/>
+              </a:lnSpc>
+              <a:buSzPct val="100000"/>
+              <a:buChar char="•"/>
+            </a:pPr>
+            <a:r>
+              <a:rPr lang="en-US" sz="1250" dirty="0">
+                <a:solidFill>
+                  <a:srgbClr val="3A3A3A"/>
+                </a:solidFill>
+                <a:latin typeface="Arial" pitchFamily="34" charset="0"/>
+                <a:ea typeface="Arial" pitchFamily="34" charset="-122"/>
+                <a:cs typeface="Arial" pitchFamily="34" charset="-120"/>
+              </a:rPr>
+              <a:t>NO — complete the log entry before the handoff.</a:t>
+            </a:r>
+            <a:endParaRPr lang="en-US" sz="1250" dirty="0"/>
+          </a:p>
+          <a:p>
+            <a:pPr marL="342900" indent="-342900">
+              <a:lnSpc>
+                <a:spcPct val="115000"/>
+              </a:lnSpc>
+              <a:buSzPct val="100000"/>
+              <a:buChar char="•"/>
+            </a:pPr>
+            <a:r>
+              <a:rPr lang="en-US" sz="1250" dirty="0">
+                <a:solidFill>
+                  <a:srgbClr val="3A3A3A"/>
+                </a:solidFill>
+                <a:latin typeface="Arial" pitchFamily="34" charset="0"/>
+                <a:ea typeface="Arial" pitchFamily="34" charset="-122"/>
+                <a:cs typeface="Arial" pitchFamily="34" charset="-120"/>
+              </a:rPr>
+              <a:t>Confirm the code against the standard fault code list.</a:t>
+            </a:r>
+            <a:endParaRPr lang="en-US" sz="1250" dirty="0"/>
+          </a:p>
+          <a:p>
+            <a:pPr marL="342900" indent="-342900">
+              <a:lnSpc>
+                <a:spcPct val="115000"/>
+              </a:lnSpc>
+              <a:buSzPct val="100000"/>
+              <a:buChar char="•"/>
+            </a:pPr>
+            <a:r>
+              <a:rPr lang="en-US" sz="1250" dirty="0">
+                <a:solidFill>
+                  <a:srgbClr val="3A3A3A"/>
+                </a:solidFill>
+                <a:latin typeface="Arial" pitchFamily="34" charset="0"/>
+                <a:ea typeface="Arial" pitchFamily="34" charset="-122"/>
+                <a:cs typeface="Arial" pitchFamily="34" charset="-120"/>
+              </a:rPr>
+              <a:t>Fails again — stop and escalate to the Shift Lead.</a:t>
+            </a:r>
+            <a:endParaRPr lang="en-US" sz="1250" dirty="0"/>
+          </a:p>
+        </p:txBody>
+      </p:sp>
+      <p:sp>
+        <p:nvSpPr>
+          <p:cNvPr id="9" name="Shape 6"/>
+          <p:cNvSpPr/>
+          <p:nvPr/>
+        </p:nvSpPr>
+        <p:spPr>
+          <a:xfrm>
+            <a:off x="6245352" y="1143000"/>
+            <a:ext cx="5486400" cy="4754880"/>
+          </a:xfrm>
+          <a:prstGeom prst="roundRect">
+            <a:avLst>
+              <a:gd name="adj" fmla="val 1538"/>
+            </a:avLst>
+          </a:prstGeom>
+          <a:solidFill>
+            <a:srgbClr val="F4F6F8"/>
+          </a:solidFill>
+          <a:ln w="12700">
+            <a:solidFill>
+              <a:srgbClr val="D9D9D9"/>
+            </a:solidFill>
+            <a:prstDash val="solid"/>
+          </a:ln>
+        </p:spPr>
+      </p:sp>
+      <p:pic>
+        <p:nvPicPr>
+          <p:cNvPr id="10" name="Image 1" descr="/home/claude/ironclad/icons/boxes.png">    </p:cNvPr>
+          <p:cNvPicPr>
+            <a:picLocks noChangeAspect="1"/>
+          </p:cNvPicPr>
+          <p:nvPr/>
+        </p:nvPicPr>
+        <p:blipFill>
+          <a:blip r:embed="rId5"/>
+          <a:stretch>
+            <a:fillRect/>
+          </a:stretch>
+        </p:blipFill>
+        <p:spPr>
+          <a:xfrm>
+            <a:off x="6519672" y="1417320"/>
+            <a:ext cx="457200" cy="457200"/>
+          </a:xfrm>
+          <a:prstGeom prst="rect">
+            <a:avLst/>
+          </a:prstGeom>
+        </p:spPr>
+      </p:pic>
+      <p:sp>
+        <p:nvSpPr>
+          <p:cNvPr id="11" name="Text 7"/>
+          <p:cNvSpPr/>
+          <p:nvPr/>
+        </p:nvSpPr>
+        <p:spPr>
+          <a:xfrm>
+            <a:off x="7114032" y="1417320"/>
+            <a:ext cx="4389120" cy="457200"/>
+          </a:xfrm>
+          <a:prstGeom prst="rect">
+            <a:avLst/>
+          </a:prstGeom>
+          <a:noFill/>
+          <a:ln/>
+        </p:spPr>
+        <p:txBody>
+          <a:bodyPr wrap="square" lIns="0" tIns="0" rIns="0" bIns="0" rtlCol="0" anchor="ctr"/>
+          <a:lstStyle/>
+          <a:p>
+            <a:pPr indent="0" marL="0">
+              <a:buNone/>
+            </a:pPr>
+            <a:r>
+              <a:rPr lang="en-US" sz="1600" b="1" dirty="0">
+                <a:solidFill>
+                  <a:srgbClr val="1F4E79"/>
+                </a:solidFill>
+                <a:latin typeface="Arial" pitchFamily="34" charset="0"/>
+                <a:ea typeface="Arial" pitchFamily="34" charset="-122"/>
+                <a:cs typeface="Arial" pitchFamily="34" charset="-120"/>
+              </a:rPr>
+              <a:t>Checkpoint 2 — Test Before Clearing (Technician)</a:t>
+            </a:r>
+            <a:endParaRPr lang="en-US" sz="1600" dirty="0"/>
+          </a:p>
+        </p:txBody>
+      </p:sp>
+      <p:sp>
+        <p:nvSpPr>
+          <p:cNvPr id="12" name="Text 8"/>
+          <p:cNvSpPr/>
+          <p:nvPr/>
+        </p:nvSpPr>
+        <p:spPr>
+          <a:xfrm>
+            <a:off x="6565392" y="2011680"/>
+            <a:ext cx="4846320" cy="3566160"/>
+          </a:xfrm>
+          <a:prstGeom prst="rect">
+            <a:avLst/>
+          </a:prstGeom>
+          <a:noFill/>
+          <a:ln/>
+        </p:spPr>
+        <p:txBody>
+          <a:bodyPr wrap="square" rtlCol="0" anchor="t"/>
+          <a:lstStyle/>
+          <a:p>
+            <a:pPr marL="342900" indent="-342900">
+              <a:lnSpc>
+                <a:spcPct val="115000"/>
+              </a:lnSpc>
+              <a:buSzPct val="100000"/>
+              <a:buChar char="•"/>
+            </a:pPr>
+            <a:r>
+              <a:rPr lang="en-US" sz="1250" dirty="0">
+                <a:solidFill>
+                  <a:srgbClr val="3A3A3A"/>
+                </a:solidFill>
+                <a:latin typeface="Arial" pitchFamily="34" charset="0"/>
+                <a:ea typeface="Arial" pitchFamily="34" charset="-122"/>
+                <a:cs typeface="Arial" pitchFamily="34" charset="-120"/>
+              </a:rPr>
+              <a:t>Check: did the test cycle confirm the fix works?</a:t>
+            </a:r>
+            <a:endParaRPr lang="en-US" sz="1250" dirty="0"/>
+          </a:p>
+          <a:p>
+            <a:pPr marL="342900" indent="-342900">
+              <a:lnSpc>
+                <a:spcPct val="115000"/>
+              </a:lnSpc>
+              <a:buSzPct val="100000"/>
+              <a:buChar char="•"/>
+            </a:pPr>
+            <a:r>
+              <a:rPr lang="en-US" sz="1250" dirty="0">
+                <a:solidFill>
+                  <a:srgbClr val="3A3A3A"/>
+                </a:solidFill>
+                <a:latin typeface="Arial" pitchFamily="34" charset="0"/>
+                <a:ea typeface="Arial" pitchFamily="34" charset="-122"/>
+                <a:cs typeface="Arial" pitchFamily="34" charset="-120"/>
+              </a:rPr>
+              <a:t>YES — log the downtime end and close the record.</a:t>
+            </a:r>
+            <a:endParaRPr lang="en-US" sz="1250" dirty="0"/>
+          </a:p>
+          <a:p>
+            <a:pPr marL="342900" indent="-342900">
+              <a:lnSpc>
+                <a:spcPct val="115000"/>
+              </a:lnSpc>
+              <a:buSzPct val="100000"/>
+              <a:buChar char="•"/>
+            </a:pPr>
+            <a:r>
+              <a:rPr lang="en-US" sz="1250" dirty="0">
+                <a:solidFill>
+                  <a:srgbClr val="3A3A3A"/>
+                </a:solidFill>
+                <a:latin typeface="Arial" pitchFamily="34" charset="0"/>
+                <a:ea typeface="Arial" pitchFamily="34" charset="-122"/>
+                <a:cs typeface="Arial" pitchFamily="34" charset="-120"/>
+              </a:rPr>
+              <a:t>NO — repeat the corrective repair.</a:t>
+            </a:r>
+            <a:endParaRPr lang="en-US" sz="1250" dirty="0"/>
+          </a:p>
+          <a:p>
+            <a:pPr marL="342900" indent="-342900">
+              <a:lnSpc>
+                <a:spcPct val="115000"/>
+              </a:lnSpc>
+              <a:buSzPct val="100000"/>
+              <a:buChar char="•"/>
+            </a:pPr>
+            <a:r>
+              <a:rPr lang="en-US" sz="1250" dirty="0">
+                <a:solidFill>
+                  <a:srgbClr val="3A3A3A"/>
+                </a:solidFill>
+                <a:latin typeface="Arial" pitchFamily="34" charset="0"/>
+                <a:ea typeface="Arial" pitchFamily="34" charset="-122"/>
+                <a:cs typeface="Arial" pitchFamily="34" charset="-120"/>
+              </a:rPr>
+              <a:t>Run the test cycle again after the repair.</a:t>
+            </a:r>
+            <a:endParaRPr lang="en-US" sz="1250" dirty="0"/>
+          </a:p>
+          <a:p>
+            <a:pPr marL="342900" indent="-342900">
+              <a:lnSpc>
+                <a:spcPct val="115000"/>
+              </a:lnSpc>
+              <a:buSzPct val="100000"/>
+              <a:buChar char="•"/>
+            </a:pPr>
+            <a:r>
+              <a:rPr lang="en-US" sz="1250" dirty="0">
+                <a:solidFill>
+                  <a:srgbClr val="3A3A3A"/>
+                </a:solidFill>
+                <a:latin typeface="Arial" pitchFamily="34" charset="0"/>
+                <a:ea typeface="Arial" pitchFamily="34" charset="-122"/>
+                <a:cs typeface="Arial" pitchFamily="34" charset="-120"/>
+              </a:rPr>
+              <a:t>Fails again — stop and escalate to engineering.</a:t>
+            </a:r>
+            <a:endParaRPr lang="en-US" sz="1250" dirty="0"/>
+          </a:p>
+          <a:p>
+            <a:pPr marL="342900" indent="-342900">
+              <a:lnSpc>
+                <a:spcPct val="115000"/>
+              </a:lnSpc>
+              <a:buSzPct val="100000"/>
+              <a:buChar char="•"/>
+            </a:pPr>
+            <a:r>
+              <a:rPr lang="en-US" sz="1250" dirty="0">
+                <a:solidFill>
+                  <a:srgbClr val="3A3A3A"/>
+                </a:solidFill>
+                <a:latin typeface="Arial" pitchFamily="34" charset="0"/>
+                <a:ea typeface="Arial" pitchFamily="34" charset="-122"/>
+                <a:cs typeface="Arial" pitchFamily="34" charset="-120"/>
+              </a:rPr>
+              <a:t>Never clear a machine that has not passed a test cycle.</a:t>
+            </a:r>
+            <a:endParaRPr lang="en-US" sz="1250" dirty="0"/>
+          </a:p>
+        </p:txBody>
+      </p:sp>
+      <p:sp>
+        <p:nvSpPr>
+          <p:cNvPr id="13" name="Text 9"/>
+          <p:cNvSpPr/>
+          <p:nvPr/>
+        </p:nvSpPr>
+        <p:spPr>
+          <a:xfrm>
+            <a:off x="457200" y="6492240"/>
+            <a:ext cx="5486400" cy="274320"/>
+          </a:xfrm>
+          <a:prstGeom prst="rect">
+            <a:avLst/>
+          </a:prstGeom>
+          <a:noFill/>
+          <a:ln/>
+        </p:spPr>
+        <p:txBody>
+          <a:bodyPr wrap="square" lIns="0" tIns="0" rIns="0" bIns="0" rtlCol="0" anchor="ctr"/>
+          <a:lstStyle/>
+          <a:p>
+            <a:pPr indent="0" marL="0">
+              <a:buNone/>
+            </a:pPr>
+            <a:r>
+              <a:rPr lang="en-US" sz="900" dirty="0">
+                <a:solidFill>
+                  <a:srgbClr val="595959"/>
+                </a:solidFill>
+                <a:latin typeface="Arial" pitchFamily="34" charset="0"/>
+                <a:ea typeface="Arial" pitchFamily="34" charset="-122"/>
+                <a:cs typeface="Arial" pitchFamily="34" charset="-120"/>
+              </a:rPr>
+              <a:t>Page 5 of 5</a:t>
+            </a:r>
+            <a:endParaRPr lang="en-US" sz="900" dirty="0"/>
+          </a:p>
+        </p:txBody>
+      </p:sp>
+      <p:sp>
+        <p:nvSpPr>
+          <p:cNvPr id="14" name="Text 10"/>
           <p:cNvSpPr/>
           <p:nvPr/>
         </p:nvSpPr>
